--- a/AI_Seminar_Proposal_v2_draft_ideas.pptx
+++ b/AI_Seminar_Proposal_v2_draft_ideas.pptx
@@ -29276,7 +29276,7 @@
                             <a:srgbClr val="2B2C30"/>
                           </a:solidFill>
                         </a:rPr>
-                        <a:t>13k+ handwritten English essays + scores</a:t>
+                        <a:t>13k+ graded handwritten essays (no public download)</a:t>
                       </a:r>
                     </a:p>
                   </a:txBody>
